--- a/dist/초3/사회·역사/공동체와교류/초3_사회·역사_공동체와교류_02_사람과물자의교류_학생용.pptx
+++ b/dist/초3/사회·역사/공동체와교류/초3_사회·역사_공동체와교류_02_사람과물자의교류_학생용.pptx
@@ -119,13 +119,13 @@
   <p:extLst>
     <p:ext uri="{521415D9-36F7-43E2-AB2F-B90AF26B5E84}">
       <p14:sectionLst xmlns:p14="http://schemas.microsoft.com/office/powerpoint/2010/main">
-        <p14:section name="도입" id="{2406f008-826a-9145-4df3-c48b5b0f7cb4}">
+        <p14:section name="도입" id="{e0864dce-f5b3-04f6-fced-6e49e705b237}">
           <p14:sldIdLst>
             <p14:sldId id="256"/>
             <p14:sldId id="257"/>
           </p14:sldIdLst>
         </p14:section>
-        <p14:section name="개념" id="{64e9921d-9339-4517-5a0b-769c69754b52}">
+        <p14:section name="개념" id="{b778c82f-2f01-f2d2-93c9-82b677a587c8}">
           <p14:sldIdLst>
             <p14:sldId id="258"/>
             <p14:sldId id="259"/>
@@ -133,31 +133,31 @@
             <p14:sldId id="262"/>
           </p14:sldIdLst>
         </p14:section>
-        <p14:section name="연습" id="{53a0733c-1f29-dcb8-7876-d4055d501fa3}">
+        <p14:section name="연습" id="{898311da-86aa-9bfa-d19d-707c945a78a1}">
           <p14:sldIdLst>
             <p14:sldId id="260"/>
             <p14:sldId id="263"/>
             <p14:sldId id="264"/>
           </p14:sldIdLst>
         </p14:section>
-        <p14:section name="개념" id="{da205675-c2e8-1e11-626e-a6099a852681}">
+        <p14:section name="개념" id="{798a4288-a874-c6e0-a0c7-4a625176aa04}">
           <p14:sldIdLst/>
         </p14:section>
-        <p14:section name="연습" id="{bba900db-ce3b-04d8-5b2a-a8db161f347f}">
+        <p14:section name="연습" id="{3f4d92dd-3f8c-5413-1349-ddec46900111}">
           <p14:sldIdLst/>
         </p14:section>
-        <p14:section name="확인" id="{6218c6b2-c6d1-efd4-657a-a5ee0d2484e4}">
+        <p14:section name="확인" id="{e642974e-edd5-af58-d67c-b75ad0150441}">
           <p14:sldIdLst>
             <p14:sldId id="265"/>
             <p14:sldId id="266"/>
           </p14:sldIdLst>
         </p14:section>
-        <p14:section name="정리" id="{8d59aedd-4f68-b4d3-42e1-b22bd851c433}">
+        <p14:section name="정리" id="{43ab70d3-5ada-f705-4dd7-2b636e4a0a59}">
           <p14:sldIdLst>
             <p14:sldId id="267"/>
           </p14:sldIdLst>
         </p14:section>
-        <p14:section name="보충" id="{bbd27bab-0e99-52af-98a8-bacd9ff1a5f1}">
+        <p14:section name="보충" id="{4de7aba6-77b7-26e3-4241-d4f5ea7dd910}">
           <p14:sldIdLst>
             <p14:sldId id="268"/>
           </p14:sldIdLst>
